--- a/module02-man-help-lab/slides.pptx
+++ b/module02-man-help-lab/slides.pptx
@@ -578,7 +578,7 @@
           <a:lstStyle/>
           <a:p>
             <a:r>
-              <a:t>Use the manual when you want the full story. Use a help flag when you need a quick reminder of options. Use whatis for a one-line summary. Use apropos when you remember the idea but not the command name. Pick the lightest tool that answers your question, then go back to work.</a:t>
+              <a:t>Use man when you want the full manual page for a command. Use a help flag—often two dashes help—when you need a short usage reminder. Use whatis for a one-line summary of what a command is. Use apropos when you remember the idea but not the command name; it searches short descriptions by keyword. Pick the lightest tool that answers your question, then go back to work.</a:t>
             </a:r>
           </a:p>
         </p:txBody>
@@ -648,7 +648,7 @@
           <a:lstStyle/>
           <a:p>
             <a:r>
-              <a:t>In the browser lab, load the starter example. You will see a sandboxed prompt and a challenge card. Try opening a short manual page, page through it, quit, then compare with a help flag. The lab is not a full system manual database—it teaches the habit. Explore a few challenges, then switch to a real shell.</a:t>
+              <a:t>In the browser lab, load the starter example. You will see a sandboxed prompt and a challenge card. Try man on a topic to open a short manual, page through it, quit, then compare with a help flag on the same command. The lab is not a full system manual database—it teaches the habit. Explore a few challenges, then switch to a real shell.</a:t>
             </a:r>
           </a:p>
         </p:txBody>
@@ -718,7 +718,7 @@
           <a:lstStyle/>
           <a:p>
             <a:r>
-              <a:t>In the real Unix track, open this module’s help example folder. Ask for a one-line summary, skim short help for list, and if your system has manuals installed, open a man page with a plain pager so it prints instead of trapping you in an interactive viewer. These same lookups will matter when you meet Icarus, Verilator, and Make later—help first, then flags.</a:t>
+              <a:t>In the real Unix track, open this module’s help example folder. First run whatis on ls to get a one-line description of list. Next run ls with the help flag and pipe the first lines through head so you only skim the short usage text. Then open the man page for ls with MANPAGER set to cat so the manual prints instead of trapping you in an interactive viewer, and again take only the first lines with head. These same lookups will matter when you meet Icarus, Verilator, and Make later—help first, then flags.</a:t>
             </a:r>
           </a:p>
         </p:txBody>
@@ -4061,7 +4061,7 @@
                 </a:solidFill>
                 <a:latin typeface="Calibri"/>
               </a:rPr>
-              <a:t>Use the manual when you want the full story</a:t>
+              <a:t>Use man when you want the full manual page for a command</a:t>
             </a:r>
           </a:p>
           <a:p>
@@ -4083,7 +4083,7 @@
                 </a:solidFill>
                 <a:latin typeface="Calibri"/>
               </a:rPr>
-              <a:t>Use a help flag when you need a quick reminder of options</a:t>
+              <a:t>Use a help flag, often two dashes help, when you need a short usage reminder</a:t>
             </a:r>
           </a:p>
           <a:p>
@@ -4105,7 +4105,7 @@
                 </a:solidFill>
                 <a:latin typeface="Calibri"/>
               </a:rPr>
-              <a:t>Use whatis for a one-line summary</a:t>
+              <a:t>Use whatis for a one-line summary of what a command is</a:t>
             </a:r>
           </a:p>
           <a:p>
@@ -4597,7 +4597,26 @@
                 <a:spcPts val="2200"/>
               </a:lnSpc>
               <a:spcAft>
-                <a:spcPts val="400"/>
+                <a:spcPts val="600"/>
+              </a:spcAft>
+            </a:pPr>
+            <a:r>
+              <a:rPr sz="2000" b="0">
+                <a:solidFill>
+                  <a:srgbClr val="333333"/>
+                </a:solidFill>
+                <a:latin typeface="Consolas"/>
+              </a:rPr>
+              <a:t># whatis — one-line summary of a command</a:t>
+            </a:r>
+          </a:p>
+          <a:p>
+            <a:pPr>
+              <a:lnSpc>
+                <a:spcPts val="2200"/>
+              </a:lnSpc>
+              <a:spcAft>
+                <a:spcPts val="600"/>
               </a:spcAft>
             </a:pPr>
             <a:r>
@@ -4616,7 +4635,45 @@
                 <a:spcPts val="2200"/>
               </a:lnSpc>
               <a:spcAft>
-                <a:spcPts val="400"/>
+                <a:spcPts val="600"/>
+              </a:spcAft>
+            </a:pPr>
+            <a:r>
+              <a:rPr sz="2000" b="0">
+                <a:solidFill>
+                  <a:srgbClr val="333333"/>
+                </a:solidFill>
+                <a:latin typeface="Consolas"/>
+              </a:rPr>
+              <a:t/>
+            </a:r>
+          </a:p>
+          <a:p>
+            <a:pPr>
+              <a:lnSpc>
+                <a:spcPts val="2200"/>
+              </a:lnSpc>
+              <a:spcAft>
+                <a:spcPts val="600"/>
+              </a:spcAft>
+            </a:pPr>
+            <a:r>
+              <a:rPr sz="2000" b="0">
+                <a:solidFill>
+                  <a:srgbClr val="333333"/>
+                </a:solidFill>
+                <a:latin typeface="Consolas"/>
+              </a:rPr>
+              <a:t># ls --help — short usage / flags; head keeps the first lines</a:t>
+            </a:r>
+          </a:p>
+          <a:p>
+            <a:pPr>
+              <a:lnSpc>
+                <a:spcPts val="2200"/>
+              </a:lnSpc>
+              <a:spcAft>
+                <a:spcPts val="600"/>
               </a:spcAft>
             </a:pPr>
             <a:r>
@@ -4635,7 +4692,45 @@
                 <a:spcPts val="2200"/>
               </a:lnSpc>
               <a:spcAft>
-                <a:spcPts val="400"/>
+                <a:spcPts val="600"/>
+              </a:spcAft>
+            </a:pPr>
+            <a:r>
+              <a:rPr sz="2000" b="0">
+                <a:solidFill>
+                  <a:srgbClr val="333333"/>
+                </a:solidFill>
+                <a:latin typeface="Consolas"/>
+              </a:rPr>
+              <a:t/>
+            </a:r>
+          </a:p>
+          <a:p>
+            <a:pPr>
+              <a:lnSpc>
+                <a:spcPts val="2200"/>
+              </a:lnSpc>
+              <a:spcAft>
+                <a:spcPts val="600"/>
+              </a:spcAft>
+            </a:pPr>
+            <a:r>
+              <a:rPr sz="2000" b="0">
+                <a:solidFill>
+                  <a:srgbClr val="333333"/>
+                </a:solidFill>
+                <a:latin typeface="Consolas"/>
+              </a:rPr>
+              <a:t># man — full manual; MANPAGER=cat prints instead of interactive pager</a:t>
+            </a:r>
+          </a:p>
+          <a:p>
+            <a:pPr>
+              <a:lnSpc>
+                <a:spcPts val="2200"/>
+              </a:lnSpc>
+              <a:spcAft>
+                <a:spcPts val="600"/>
               </a:spcAft>
             </a:pPr>
             <a:r>
